--- a/presentation/assets/template.pptx
+++ b/presentation/assets/template.pptx
@@ -10,13 +10,6 @@
   <p:sldIdLst/>
   <p:sldSz cx="9906000" cy="6858000" type="A4"/>
   <p:notesSz cx="6858000" cy="9144000"/>
-  <p:embeddedFontLst>
-    <p:embeddedFont>
-      <p:font typeface="맑은 고딕" panose="020B0503020000020004" pitchFamily="50" charset="-127"/>
-      <p:regular r:id="rId79"/>
-      <p:bold r:id="rId80"/>
-    </p:embeddedFont>
-  </p:embeddedFontLst>
   <p:defaultTextStyle>
     <a:defPPr>
       <a:defRPr lang="ko-KR"/>
